--- a/06_optimizers/excel_optimizers_slides.pptx
+++ b/06_optimizers/excel_optimizers_slides.pptx
@@ -3278,16 +3278,8 @@
           </a:bodyPr>
           <a:lstStyle/>
           <a:p>
-            <a:pPr algn="l">
-              <a:defRPr sz="1500" b="1">
-                <a:solidFill>
-                  <a:srgbClr val="475569"/>
-                </a:solidFill>
-                <a:latin typeface="Yu Gothic"/>
-              </a:defRPr>
-            </a:pPr>
-            <a:r>
-              <a:t>同じ勾配でも更新量が変わることを見る</a:t>
+            <a:r>
+              <a:t>同じ勾配でも手法ごとに更新量が変わることを見る</a:t>
             </a:r>
           </a:p>
         </p:txBody>
@@ -4905,24 +4897,16 @@
           <a:bodyPr rtlCol="0" anchor="ctr" wrap="square" bIns="36576"/>
           <a:lstStyle/>
           <a:p>
-            <a:pPr algn="ctr">
-              <a:defRPr sz="1700" b="1">
-                <a:solidFill>
-                  <a:srgbClr val="276749"/>
-                </a:solidFill>
-                <a:latin typeface="Yu Gothic"/>
-              </a:defRPr>
-            </a:pPr>
-            <a:r>
-              <a:t>まずは</a:t>
+            <a:r>
+              <a:t>compareで</a:t>
             </a:r>
             <a:br/>
             <a:r>
-              <a:t>基本の表</a:t>
+              <a:t>手法ごとの差を</a:t>
             </a:r>
             <a:br/>
             <a:r>
-              <a:t>から読む</a:t>
+              <a:t>読む</a:t>
             </a:r>
           </a:p>
         </p:txBody>
@@ -5378,20 +5362,12 @@
           <a:bodyPr rtlCol="0" anchor="ctr" wrap="square" bIns="36576"/>
           <a:lstStyle/>
           <a:p>
-            <a:pPr algn="ctr">
-              <a:defRPr sz="1700" b="1">
-                <a:solidFill>
-                  <a:srgbClr val="2F6690"/>
-                </a:solidFill>
-                <a:latin typeface="Yu Gothic"/>
-              </a:defRPr>
-            </a:pPr>
-            <a:r>
-              <a:t>列名を</a:t>
+            <a:r>
+              <a:t>weight列と</a:t>
             </a:r>
             <a:br/>
             <a:r>
-              <a:t>計算の役割に</a:t>
+              <a:t>update列を</a:t>
             </a:r>
             <a:br/>
             <a:r>
@@ -5851,24 +5827,16 @@
           <a:bodyPr rtlCol="0" anchor="ctr" wrap="square" bIns="36576"/>
           <a:lstStyle/>
           <a:p>
-            <a:pPr algn="ctr">
-              <a:defRPr sz="1700" b="1">
-                <a:solidFill>
-                  <a:srgbClr val="276749"/>
-                </a:solidFill>
-                <a:latin typeface="Yu Gothic"/>
-              </a:defRPr>
-            </a:pPr>
-            <a:r>
-              <a:t>設定を変えたら</a:t>
+            <a:r>
+              <a:t>learning_rateや</a:t>
             </a:r>
             <a:br/>
             <a:r>
-              <a:t>どの列が動くかを</a:t>
+              <a:t>rms_decayで</a:t>
             </a:r>
             <a:br/>
             <a:r>
-              <a:t>見る</a:t>
+              <a:t>更新量の差を見る</a:t>
             </a:r>
           </a:p>
         </p:txBody>
@@ -6463,16 +6431,8 @@
           <a:bodyPr rtlCol="0" anchor="ctr" wrap="square" bIns="36576"/>
           <a:lstStyle/>
           <a:p>
-            <a:pPr algn="ctr">
-              <a:defRPr sz="1400" b="1">
-                <a:solidFill>
-                  <a:srgbClr val="24324B"/>
-                </a:solidFill>
-                <a:latin typeface="Yu Gothic"/>
-              </a:defRPr>
-            </a:pPr>
-            <a:r>
-              <a:t>更新方法の違いを比較する</a:t>
+            <a:r>
+              <a:t>5手法の更新量とweight推移を比較する</a:t>
             </a:r>
           </a:p>
         </p:txBody>
@@ -6968,16 +6928,8 @@
           <a:bodyPr rtlCol="0" anchor="ctr" wrap="square" bIns="36576"/>
           <a:lstStyle/>
           <a:p>
-            <a:pPr algn="ctr">
-              <a:defRPr sz="1600" b="1">
-                <a:solidFill>
-                  <a:srgbClr val="24324B"/>
-                </a:solidFill>
-                <a:latin typeface="Yu Gothic"/>
-              </a:defRPr>
-            </a:pPr>
-            <a:r>
-              <a:t>小さくしているのは、式と表の対応を見失わないためです。</a:t>
+            <a:r>
+              <a:t>この回では1つの重みだけを動かし、手法ごとの更新量の違いに絞ります。</a:t>
             </a:r>
           </a:p>
         </p:txBody>
@@ -7315,16 +7267,8 @@
           </a:bodyPr>
           <a:lstStyle/>
           <a:p>
-            <a:pPr algn="ctr">
-              <a:defRPr sz="1800" b="1">
-                <a:solidFill>
-                  <a:srgbClr val="24324B"/>
-                </a:solidFill>
-                <a:latin typeface="Yu Gothic"/>
-              </a:defRPr>
-            </a:pPr>
-            <a:r>
-              <a:t>同じ勾配でも更新量が変わることを見る</a:t>
+            <a:r>
+              <a:t>同じ勾配でも手法ごとに更新量が変わることを見る</a:t>
             </a:r>
           </a:p>
         </p:txBody>
@@ -7449,16 +7393,33 @@
           </a:bodyPr>
           <a:lstStyle/>
           <a:p>
-            <a:pPr algn="l">
-              <a:defRPr sz="2500" b="1">
-                <a:solidFill>
-                  <a:srgbClr val="24324B"/>
-                </a:solidFill>
-                <a:latin typeface="Yu Gothic"/>
-              </a:defRPr>
-            </a:pPr>
             <a:r>
               <a:t>この回の用語</a:t>
+            </a:r>
+          </a:p>
+          <a:p>
+            <a:r>
+              <a:t>SGD: 現在の勾配で更新する方法</a:t>
+            </a:r>
+          </a:p>
+          <a:p>
+            <a:r>
+              <a:t>Momentum: 過去の向きを速度として残す方法</a:t>
+            </a:r>
+          </a:p>
+          <a:p>
+            <a:r>
+              <a:t>AdaGrad: 勾配二乗和で更新量を調整する方法</a:t>
+            </a:r>
+          </a:p>
+          <a:p>
+            <a:r>
+              <a:t>RMSProp: 勾配二乗の移動平均を使う方法</a:t>
+            </a:r>
+          </a:p>
+          <a:p>
+            <a:r>
+              <a:t>Adam: 勾配と勾配二乗の移動平均を使う方法</a:t>
             </a:r>
           </a:p>
         </p:txBody>
@@ -8554,16 +8515,8 @@
           <a:bodyPr rtlCol="0" anchor="ctr" wrap="square" bIns="36576"/>
           <a:lstStyle/>
           <a:p>
-            <a:pPr algn="ctr">
-              <a:defRPr sz="1400" b="1">
-                <a:solidFill>
-                  <a:srgbClr val="24324B"/>
-                </a:solidFill>
-                <a:latin typeface="Yu Gothic"/>
-              </a:defRPr>
-            </a:pPr>
-            <a:r>
-              <a:t>勾配の使い方で進み方が変わる</a:t>
+            <a:r>
+              <a:t>勾配の記憶の仕方で進み方が変わる</a:t>
             </a:r>
           </a:p>
         </p:txBody>
@@ -8688,16 +8641,8 @@
           </a:bodyPr>
           <a:lstStyle/>
           <a:p>
-            <a:pPr algn="l">
-              <a:defRPr sz="2500" b="1">
-                <a:solidFill>
-                  <a:srgbClr val="24324B"/>
-                </a:solidFill>
-                <a:latin typeface="Yu Gothic"/>
-              </a:defRPr>
-            </a:pPr>
-            <a:r>
-              <a:t>同じ勾配でも更新量が変わることを見る</a:t>
+            <a:r>
+              <a:t>同じ勾配でも手法ごとに更新量が変わることを見る</a:t>
             </a:r>
           </a:p>
         </p:txBody>
@@ -8724,65 +8669,21 @@
           </a:bodyPr>
           <a:lstStyle/>
           <a:p>
-            <a:pPr>
-              <a:spcAft>
-                <a:spcPts val="800"/>
-              </a:spcAft>
-              <a:defRPr sz="1600">
-                <a:solidFill>
-                  <a:srgbClr val="24324B"/>
-                </a:solidFill>
-                <a:latin typeface="Yu Gothic"/>
-              </a:defRPr>
-            </a:pPr>
-            <a:r>
-              <a:t>• 同じ勾配でも更新量が変わることを見る</a:t>
-            </a:r>
-          </a:p>
-          <a:p>
-            <a:pPr>
-              <a:spcAft>
-                <a:spcPts val="800"/>
-              </a:spcAft>
-              <a:defRPr sz="1600">
-                <a:solidFill>
-                  <a:srgbClr val="24324B"/>
-                </a:solidFill>
-                <a:latin typeface="Yu Gothic"/>
-              </a:defRPr>
-            </a:pPr>
+            <a:r>
+              <a:t>• 同じ勾配でも手法ごとに更新量が変わることを見る</a:t>
+            </a:r>
+          </a:p>
+          <a:p>
             <a:r>
               <a:t>• Excel上の値や設定を変更する</a:t>
             </a:r>
           </a:p>
           <a:p>
-            <a:pPr>
-              <a:spcAft>
-                <a:spcPts val="800"/>
-              </a:spcAft>
-              <a:defRPr sz="1600">
-                <a:solidFill>
-                  <a:srgbClr val="24324B"/>
-                </a:solidFill>
-                <a:latin typeface="Yu Gothic"/>
-              </a:defRPr>
-            </a:pPr>
             <a:r>
               <a:t>• PythonがWorkbookから読み直して計算する</a:t>
             </a:r>
           </a:p>
           <a:p>
-            <a:pPr>
-              <a:spcAft>
-                <a:spcPts val="800"/>
-              </a:spcAft>
-              <a:defRPr sz="1600">
-                <a:solidFill>
-                  <a:srgbClr val="24324B"/>
-                </a:solidFill>
-                <a:latin typeface="Yu Gothic"/>
-              </a:defRPr>
-            </a:pPr>
             <a:r>
               <a:t>• 返却表の列を見て変化を確認する</a:t>
             </a:r>
@@ -8830,21 +8731,13 @@
           <a:bodyPr rtlCol="0" anchor="ctr" wrap="square" bIns="36576"/>
           <a:lstStyle/>
           <a:p>
-            <a:pPr algn="ctr">
-              <a:defRPr sz="1100" b="1">
-                <a:solidFill>
-                  <a:srgbClr val="2F6690"/>
-                </a:solidFill>
-                <a:latin typeface="Yu Gothic"/>
-              </a:defRPr>
-            </a:pPr>
             <a:r>
               <a:t>最適化手法とは</a:t>
             </a:r>
             <a:br/>
             <a:br/>
             <a:r>
-              <a:t>最適化手法とは、勾配を使ってパラメータをどう更新するかを決める方法です。SGD、Momentum、Adamなどがあります。</a:t>
+              <a:t>最適化手法とは、勾配を使ってパラメータをどう更新するかを決める方法です。SGD、Momentum、AdaGrad、RMSProp、Adamなどがあります。</a:t>
             </a:r>
           </a:p>
         </p:txBody>
@@ -8890,14 +8783,6 @@
           <a:bodyPr rtlCol="0" anchor="ctr" wrap="square" bIns="36576"/>
           <a:lstStyle/>
           <a:p>
-            <a:pPr algn="ctr">
-              <a:defRPr sz="1500" b="1">
-                <a:solidFill>
-                  <a:srgbClr val="276749"/>
-                </a:solidFill>
-                <a:latin typeface="Yu Gothic"/>
-              </a:defRPr>
-            </a:pPr>
             <a:r>
               <a:t>見える変化</a:t>
             </a:r>
@@ -8908,7 +8793,7 @@
             </a:r>
             <a:br/>
             <a:r>
-              <a:t>更新量</a:t>
+              <a:t>methodごとの更新量</a:t>
             </a:r>
           </a:p>
         </p:txBody>
@@ -10363,16 +10248,8 @@
           <a:bodyPr rtlCol="0" anchor="ctr" wrap="square" bIns="36576"/>
           <a:lstStyle/>
           <a:p>
-            <a:pPr algn="ctr">
-              <a:defRPr sz="1500" b="1">
-                <a:solidFill>
-                  <a:srgbClr val="276749"/>
-                </a:solidFill>
-                <a:latin typeface="Yu Gothic"/>
-              </a:defRPr>
-            </a:pPr>
-            <a:r>
-              <a:t>勾配の使い方で進み方が変わる</a:t>
+            <a:r>
+              <a:t>勾配の記憶の仕方で進み方が変わる</a:t>
             </a:r>
           </a:p>
         </p:txBody>
@@ -10418,16 +10295,8 @@
           <a:bodyPr rtlCol="0" anchor="ctr" wrap="square" bIns="36576"/>
           <a:lstStyle/>
           <a:p>
-            <a:pPr algn="ctr">
-              <a:defRPr sz="1400" b="1">
-                <a:solidFill>
-                  <a:srgbClr val="276749"/>
-                </a:solidFill>
-                <a:latin typeface="Yu Gothic"/>
-              </a:defRPr>
-            </a:pPr>
-            <a:r>
-              <a:t>勾配の使い方で進み方が変わる</a:t>
+            <a:r>
+              <a:t>勾配の記憶の仕方で進み方が変わる</a:t>
             </a:r>
           </a:p>
         </p:txBody>
@@ -13364,20 +13233,12 @@
           <a:bodyPr rtlCol="0" anchor="ctr" wrap="square" bIns="36576"/>
           <a:lstStyle/>
           <a:p>
-            <a:pPr algn="ctr">
-              <a:defRPr sz="1800" b="1">
-                <a:solidFill>
-                  <a:srgbClr val="276749"/>
-                </a:solidFill>
-                <a:latin typeface="Yu Gothic"/>
-              </a:defRPr>
-            </a:pPr>
-            <a:r>
-              <a:t>初期値の</a:t>
+            <a:r>
+              <a:t>5手法の</a:t>
             </a:r>
             <a:br/>
             <a:r>
-              <a:t>結果を読む</a:t>
+              <a:t>weightを読む</a:t>
             </a:r>
           </a:p>
         </p:txBody>
